--- a/pptx/crimson-grad/occ-conference.pptx
+++ b/pptx/crimson-grad/occ-conference.pptx
@@ -86,7 +86,7 @@
               <c:strCache>
                 <c:ptCount val="1"/>
                 <c:pt idx="0">
-                  <c:v>CD8 점수</c:v>
+                  <c:v>CD8 score</c:v>
                 </c:pt>
               </c:strCache>
             </c:strRef>
@@ -122,7 +122,7 @@
                         </a:solidFill>
                         <a:latin typeface="Pretendard"/>
                       </a:rPr>
-                      <a:t>3.2배</a:t>
+                      <a:t>3.2×</a:t>
                     </a:r>
                   </a:p>
                 </c:rich>
@@ -149,13 +149,13 @@
               <c:strCache>
                 <c:ptCount val="3"/>
                 <c:pt idx="0">
-                  <c:v>정상</c:v>
+                  <c:v>Normal</c:v>
                 </c:pt>
                 <c:pt idx="1">
-                  <c:v>종양 안쪽</c:v>
+                  <c:v>Tumor core</c:v>
                 </c:pt>
                 <c:pt idx="2">
-                  <c:v>경계부</c:v>
+                  <c:v>Border</c:v>
                 </c:pt>
               </c:strCache>
             </c:strRef>
@@ -248,7 +248,7 @@
                     </a:solidFill>
                     <a:latin typeface="Pretendard"/>
                   </a:rPr>
-                  <a:t>상대 점수 (종양 안쪽 = 1)</a:t>
+                  <a:t>Relative score (tumor core = 1)</a:t>
                 </a:r>
               </a:p>
             </c:rich>
@@ -324,7 +324,7 @@
               <c:strCache>
                 <c:ptCount val="1"/>
                 <c:pt idx="0">
-                  <c:v>섬유아세포 신호</c:v>
+                  <c:v>Fibroblast signal</c:v>
                 </c:pt>
               </c:strCache>
             </c:strRef>
@@ -387,10 +387,10 @@
               <c:strCache>
                 <c:ptCount val="2"/>
                 <c:pt idx="0">
-                  <c:v>반응군 (n = 6)</c:v>
+                  <c:v>Responders (n = 6)</c:v>
                 </c:pt>
                 <c:pt idx="1">
-                  <c:v>비반응군 (n = 9)</c:v>
+                  <c:v>Non-responders (n = 9)</c:v>
                 </c:pt>
               </c:strCache>
             </c:strRef>
@@ -480,7 +480,7 @@
                     </a:solidFill>
                     <a:latin typeface="Pretendard"/>
                   </a:rPr>
-                  <a:t>경계부 섬유아세포 신호 (비반응군 = 1)</a:t>
+                  <a:t>Border fibroblast signal (non-responders = 1)</a:t>
                 </a:r>
               </a:p>
             </c:rich>
@@ -3881,7 +3881,7 @@
           <a:lstStyle/>
           <a:p>
             <a:r>
-              <a:t>2026 한국유전체학회 · 구두 발표</a:t>
+              <a:t>Annual meeting 2026 · Oral presentation</a:t>
             </a:r>
           </a:p>
         </p:txBody>
@@ -3902,7 +3902,7 @@
           <a:lstStyle/>
           <a:p>
             <a:r>
-              <a:t>경계부 면역 틈새가 면역항암 반응을 가른다</a:t>
+              <a:t>Border niches gate immunotherapy</a:t>
             </a:r>
           </a:p>
         </p:txBody>
@@ -3923,7 +3923,7 @@
           <a:lstStyle/>
           <a:p>
             <a:r>
-              <a:t>공간전사체 4개 절편 분석</a:t>
+              <a:t>Spatial transcriptomics of 4 colorectal cancer sections</a:t>
             </a:r>
           </a:p>
         </p:txBody>
@@ -3949,7 +3949,7 @@
           </a:p>
           <a:p>
             <a:r>
-              <a:t>HaLab 발표자</a:t>
+              <a:t>HaLab presenter</a:t>
             </a:r>
           </a:p>
         </p:txBody>
@@ -3988,7 +3988,7 @@
           <a:lstStyle/>
           <a:p>
             <a:r>
-              <a:t>왜 중요한가</a:t>
+              <a:t>Why it matters</a:t>
             </a:r>
           </a:p>
         </p:txBody>
@@ -4009,7 +4009,7 @@
           <a:lstStyle/>
           <a:p>
             <a:r>
-              <a:t>면역항암제는 대장암 환자 10명 중 1명에게만 들어요</a:t>
+              <a:t>Immunotherapy helps only 1 in 10 colorectal cancer patients</a:t>
             </a:r>
           </a:p>
         </p:txBody>
@@ -4168,7 +4168,7 @@
                   <a:srgbClr val="262B33"/>
                 </a:solidFill>
               </a:rPr>
-              <a:t>면역항암제 반응률</a:t>
+              <a:t>Respond to immunotherapy</a:t>
             </a:r>
           </a:p>
         </p:txBody>
@@ -4206,7 +4206,7 @@
                   <a:srgbClr val="6B7280"/>
                 </a:solidFill>
               </a:rPr>
-              <a:t>전이성 대장암 (예시 수치)</a:t>
+              <a:t>Metastatic colorectal cancer (example)</a:t>
             </a:r>
           </a:p>
         </p:txBody>
@@ -4358,7 +4358,7 @@
                   <a:srgbClr val="262B33"/>
                 </a:solidFill>
               </a:rPr>
-              <a:t>반응하지 않는 환자</a:t>
+              <a:t>Do not respond</a:t>
             </a:r>
           </a:p>
         </p:txBody>
@@ -4396,7 +4396,7 @@
                   <a:srgbClr val="6B7280"/>
                 </a:solidFill>
               </a:rPr>
-              <a:t>MSI 검사로는 절반만 가려냄</a:t>
+              <a:t>MSI testing explains only half</a:t>
             </a:r>
           </a:p>
         </p:txBody>
@@ -4464,28 +4464,20 @@
               </a:lnSpc>
             </a:pPr>
             <a:r>
+              <a:rPr sz="1400" b="1" spc="-40">
+                <a:solidFill>
+                  <a:srgbClr val="262B33"/>
+                </a:solidFill>
+              </a:rPr>
+              <a:t>Why</a:t>
+            </a:r>
+            <a:r>
               <a:rPr sz="1400" b="0" spc="-40">
                 <a:solidFill>
                   <a:srgbClr val="6B7280"/>
                 </a:solidFill>
               </a:rPr>
-              <a:t>나머지 90%는 </a:t>
-            </a:r>
-            <a:r>
-              <a:rPr sz="1400" b="1" spc="-40">
-                <a:solidFill>
-                  <a:srgbClr val="262B33"/>
-                </a:solidFill>
-              </a:rPr>
-              <a:t>왜</a:t>
-            </a:r>
-            <a:r>
-              <a:rPr sz="1400" b="0" spc="-40">
-                <a:solidFill>
-                  <a:srgbClr val="6B7280"/>
-                </a:solidFill>
-              </a:rPr>
-              <a:t> 반응하지 않을까?</a:t>
+              <a:t> do the other 90% not respond?</a:t>
             </a:r>
           </a:p>
         </p:txBody>
@@ -4546,7 +4538,7 @@
           <a:lstStyle/>
           <a:p>
             <a:r>
-              <a:t>가설</a:t>
+              <a:t>Hypothesis</a:t>
             </a:r>
           </a:p>
         </p:txBody>
@@ -4567,7 +4559,7 @@
           <a:lstStyle/>
           <a:p>
             <a:r>
-              <a:t>섬유아세포 장벽이 T세포가 종양 안으로 들어가는 걸 막아요</a:t>
+              <a:t>A fibroblast barrier keeps T cells out of the tumor</a:t>
             </a:r>
           </a:p>
         </p:txBody>
@@ -4580,8 +4572,8 @@
         </p:nvCxnSpPr>
         <p:spPr>
           <a:xfrm>
-            <a:off x="2464461" y="2922938"/>
-            <a:ext cx="1070892" cy="0"/>
+            <a:off x="2688121" y="2923408"/>
+            <a:ext cx="772679" cy="0"/>
           </a:xfrm>
           <a:prstGeom prst="line">
             <a:avLst/>
@@ -4616,8 +4608,8 @@
         </p:nvCxnSpPr>
         <p:spPr>
           <a:xfrm>
-            <a:off x="5560614" y="2922938"/>
-            <a:ext cx="1070892" cy="0"/>
+            <a:off x="5709721" y="2923408"/>
+            <a:ext cx="772678" cy="0"/>
           </a:xfrm>
           <a:prstGeom prst="line">
             <a:avLst/>
@@ -4653,8 +4645,8 @@
         </p:nvCxnSpPr>
         <p:spPr>
           <a:xfrm>
-            <a:off x="8656767" y="2922938"/>
-            <a:ext cx="1070892" cy="0"/>
+            <a:off x="8731320" y="2923408"/>
+            <a:ext cx="772679" cy="0"/>
           </a:xfrm>
           <a:prstGeom prst="line">
             <a:avLst/>
@@ -4690,8 +4682,8 @@
         </p:nvSpPr>
         <p:spPr>
           <a:xfrm>
-            <a:off x="468000" y="2545552"/>
-            <a:ext cx="1967661" cy="754773"/>
+            <a:off x="468000" y="2546022"/>
+            <a:ext cx="2191321" cy="754773"/>
           </a:xfrm>
           <a:prstGeom prst="rect">
             <a:avLst/>
@@ -4734,8 +4726,8 @@
         </p:nvSpPr>
         <p:spPr>
           <a:xfrm>
-            <a:off x="655200" y="2545552"/>
-            <a:ext cx="1593261" cy="754773"/>
+            <a:off x="655200" y="2546022"/>
+            <a:ext cx="1816921" cy="754773"/>
           </a:xfrm>
           <a:prstGeom prst="rect">
             <a:avLst/>
@@ -4759,7 +4751,7 @@
                   <a:srgbClr val="262B33"/>
                 </a:solidFill>
               </a:rPr>
-              <a:t>TGF-β 신호</a:t>
+              <a:t>TGF-β signaling</a:t>
             </a:r>
           </a:p>
         </p:txBody>
@@ -4772,8 +4764,8 @@
         </p:nvSpPr>
         <p:spPr>
           <a:xfrm>
-            <a:off x="3564153" y="2312963"/>
-            <a:ext cx="1967661" cy="1219950"/>
+            <a:off x="3489600" y="2312022"/>
+            <a:ext cx="2191321" cy="1222773"/>
           </a:xfrm>
           <a:prstGeom prst="ellipse">
             <a:avLst/>
@@ -4814,8 +4806,8 @@
         </p:nvSpPr>
         <p:spPr>
           <a:xfrm>
-            <a:off x="3859302" y="2312963"/>
-            <a:ext cx="1377363" cy="1219950"/>
+            <a:off x="3818298" y="2312022"/>
+            <a:ext cx="1533925" cy="1222773"/>
           </a:xfrm>
           <a:prstGeom prst="rect">
             <a:avLst/>
@@ -4839,7 +4831,7 @@
                   <a:srgbClr val="FFFFFF"/>
                 </a:solidFill>
               </a:rPr>
-              <a:t>경계부 섬유아세포</a:t>
+              <a:t>Border fibroblasts</a:t>
             </a:r>
           </a:p>
           <a:p>
@@ -4857,7 +4849,7 @@
                   <a:srgbClr val="FFFFFF"/>
                 </a:solidFill>
               </a:rPr>
-              <a:t>이번 연구</a:t>
+              <a:t>This study</a:t>
             </a:r>
           </a:p>
         </p:txBody>
@@ -4870,8 +4862,8 @@
         </p:nvSpPr>
         <p:spPr>
           <a:xfrm>
-            <a:off x="6660306" y="2545552"/>
-            <a:ext cx="1967661" cy="754773"/>
+            <a:off x="6511199" y="2546022"/>
+            <a:ext cx="2191321" cy="754773"/>
           </a:xfrm>
           <a:prstGeom prst="roundRect">
             <a:avLst>
@@ -4914,8 +4906,8 @@
         </p:nvSpPr>
         <p:spPr>
           <a:xfrm>
-            <a:off x="6847506" y="2545552"/>
-            <a:ext cx="1593261" cy="754773"/>
+            <a:off x="6698399" y="2546022"/>
+            <a:ext cx="1816921" cy="754773"/>
           </a:xfrm>
           <a:prstGeom prst="rect">
             <a:avLst/>
@@ -4939,7 +4931,7 @@
                   <a:srgbClr val="262B33"/>
                 </a:solidFill>
               </a:rPr>
-              <a:t>콜라겐 장벽</a:t>
+              <a:t>Collagen barrier</a:t>
             </a:r>
           </a:p>
         </p:txBody>
@@ -4952,8 +4944,8 @@
         </p:nvSpPr>
         <p:spPr>
           <a:xfrm>
-            <a:off x="9756459" y="2545552"/>
-            <a:ext cx="1967661" cy="754773"/>
+            <a:off x="9532799" y="2546022"/>
+            <a:ext cx="2191321" cy="754773"/>
           </a:xfrm>
           <a:prstGeom prst="rect">
             <a:avLst/>
@@ -4996,8 +4988,8 @@
         </p:nvSpPr>
         <p:spPr>
           <a:xfrm>
-            <a:off x="9943659" y="2545552"/>
-            <a:ext cx="1593261" cy="754773"/>
+            <a:off x="9719999" y="2546022"/>
+            <a:ext cx="1816921" cy="754773"/>
           </a:xfrm>
           <a:prstGeom prst="rect">
             <a:avLst/>
@@ -5021,7 +5013,7 @@
                   <a:srgbClr val="262B33"/>
                 </a:solidFill>
               </a:rPr>
-              <a:t>T세포 침투 실패</a:t>
+              <a:t>T-cell exclusion</a:t>
             </a:r>
           </a:p>
         </p:txBody>
@@ -5034,7 +5026,7 @@
         </p:nvCxnSpPr>
         <p:spPr>
           <a:xfrm>
-            <a:off x="9063673" y="3834496"/>
+            <a:off x="8944139" y="3836377"/>
             <a:ext cx="421200" cy="0"/>
           </a:xfrm>
           <a:prstGeom prst="line">
@@ -5070,8 +5062,8 @@
         </p:nvSpPr>
         <p:spPr>
           <a:xfrm>
-            <a:off x="9578473" y="3743513"/>
-            <a:ext cx="738340" cy="181966"/>
+            <a:off x="9458939" y="3745395"/>
+            <a:ext cx="513177" cy="181966"/>
           </a:xfrm>
           <a:prstGeom prst="rect">
             <a:avLst/>
@@ -5095,7 +5087,7 @@
                   <a:srgbClr val="6B7280"/>
                 </a:solidFill>
               </a:rPr>
-              <a:t>알려진 경로</a:t>
+              <a:t>Known</a:t>
             </a:r>
           </a:p>
         </p:txBody>
@@ -5108,7 +5100,7 @@
         </p:nvCxnSpPr>
         <p:spPr>
           <a:xfrm>
-            <a:off x="10597614" y="3834496"/>
+            <a:off x="10252917" y="3836377"/>
             <a:ext cx="421200" cy="0"/>
           </a:xfrm>
           <a:prstGeom prst="line">
@@ -5145,8 +5137,8 @@
         </p:nvSpPr>
         <p:spPr>
           <a:xfrm>
-            <a:off x="11112414" y="3743513"/>
-            <a:ext cx="611706" cy="181966"/>
+            <a:off x="10767717" y="3745395"/>
+            <a:ext cx="956403" cy="181966"/>
           </a:xfrm>
           <a:prstGeom prst="rect">
             <a:avLst/>
@@ -5170,7 +5162,7 @@
                   <a:srgbClr val="6B7280"/>
                 </a:solidFill>
               </a:rPr>
-              <a:t>가설 경로</a:t>
+              <a:t>Hypothesized</a:t>
             </a:r>
           </a:p>
         </p:txBody>
@@ -5183,7 +5175,7 @@
         </p:nvCxnSpPr>
         <p:spPr>
           <a:xfrm>
-            <a:off x="468000" y="4141479"/>
+            <a:off x="468000" y="4143360"/>
             <a:ext cx="11256120" cy="0"/>
           </a:xfrm>
           <a:prstGeom prst="line">
@@ -5218,7 +5210,7 @@
         </p:nvSpPr>
         <p:spPr>
           <a:xfrm>
-            <a:off x="468000" y="4339479"/>
+            <a:off x="468000" y="4341360"/>
             <a:ext cx="11256120" cy="304596"/>
           </a:xfrm>
           <a:prstGeom prst="rect">
@@ -5243,7 +5235,7 @@
                   <a:srgbClr val="6B7280"/>
                 </a:solidFill>
               </a:rPr>
-              <a:t>확인할 것: 장벽을 없애면 CD8 T세포가 종양 안으로 들어가는가</a:t>
+              <a:t>To test: do CD8 T cells enter the tumor when the barrier is removed?</a:t>
             </a:r>
           </a:p>
         </p:txBody>
@@ -5304,7 +5296,7 @@
           <a:lstStyle/>
           <a:p>
             <a:r>
-              <a:t>결과 1</a:t>
+              <a:t>Result 1</a:t>
             </a:r>
           </a:p>
         </p:txBody>
@@ -5325,7 +5317,7 @@
           <a:lstStyle/>
           <a:p>
             <a:r>
-              <a:t>경계부에 면역세포가 띠처럼 모여 있어요</a:t>
+              <a:t>Immune cells gather in a band at the tumor border</a:t>
             </a:r>
           </a:p>
         </p:txBody>
@@ -5496,7 +5488,7 @@
                   <a:srgbClr val="6B7280"/>
                 </a:solidFill>
               </a:rPr>
-              <a:t>절편 2, 스팟 1,492개, 클러스터 6개 (예시 데이터)</a:t>
+              <a:t>Section 2, 1,492 spots, 6 clusters (example data)</a:t>
             </a:r>
           </a:p>
         </p:txBody>
@@ -5510,7 +5502,7 @@
         <p:spPr>
           <a:xfrm>
             <a:off x="8044080" y="1584000"/>
-            <a:ext cx="3680040" cy="1341126"/>
+            <a:ext cx="3680040" cy="1617107"/>
           </a:xfrm>
           <a:prstGeom prst="rect">
             <a:avLst/>
@@ -5551,7 +5543,7 @@
         </p:nvCxnSpPr>
         <p:spPr>
           <a:xfrm>
-            <a:off x="8044080" y="2925126"/>
+            <a:off x="8044080" y="3201107"/>
             <a:ext cx="3680040" cy="0"/>
           </a:xfrm>
           <a:prstGeom prst="line">
@@ -5663,7 +5655,7 @@
                   <a:srgbClr val="262B33"/>
                 </a:solidFill>
               </a:rPr>
-              <a:t>경계부</a:t>
+              <a:t>Border</a:t>
             </a:r>
           </a:p>
         </p:txBody>
@@ -5677,7 +5669,7 @@
         <p:spPr>
           <a:xfrm>
             <a:off x="8512080" y="2289145"/>
-            <a:ext cx="3212040" cy="293981"/>
+            <a:ext cx="3212040" cy="569962"/>
           </a:xfrm>
           <a:prstGeom prst="rect">
             <a:avLst/>
@@ -5701,7 +5693,7 @@
                   <a:srgbClr val="6B7280"/>
                 </a:solidFill>
               </a:rPr>
-              <a:t>클러스터 3, 면역세포 표지가 높은 얇은 띠</a:t>
+              <a:t>Cluster 3, a thin band high in immune markers</a:t>
             </a:r>
           </a:p>
         </p:txBody>
@@ -5714,7 +5706,7 @@
         </p:nvSpPr>
         <p:spPr>
           <a:xfrm>
-            <a:off x="8044080" y="3286699"/>
+            <a:off x="8044080" y="3700670"/>
             <a:ext cx="288000" cy="288000"/>
           </a:xfrm>
           <a:prstGeom prst="ellipse">
@@ -5766,7 +5758,7 @@
         </p:nvSpPr>
         <p:spPr>
           <a:xfrm>
-            <a:off x="8512080" y="3285126"/>
+            <a:off x="8512080" y="3699098"/>
             <a:ext cx="3212040" cy="291145"/>
           </a:xfrm>
           <a:prstGeom prst="rect">
@@ -5791,7 +5783,7 @@
                   <a:srgbClr val="262B33"/>
                 </a:solidFill>
               </a:rPr>
-              <a:t>종양 안쪽</a:t>
+              <a:t>Tumor core</a:t>
             </a:r>
           </a:p>
         </p:txBody>
@@ -5804,7 +5796,7 @@
         </p:nvSpPr>
         <p:spPr>
           <a:xfrm>
-            <a:off x="8512080" y="3630271"/>
+            <a:off x="8512080" y="4044243"/>
             <a:ext cx="3212040" cy="293981"/>
           </a:xfrm>
           <a:prstGeom prst="rect">
@@ -5829,7 +5821,7 @@
                   <a:srgbClr val="6B7280"/>
                 </a:solidFill>
               </a:rPr>
-              <a:t>클러스터 1 · 2, 면역 표지 낮음</a:t>
+              <a:t>Clusters 1 · 2, low immune markers</a:t>
             </a:r>
           </a:p>
         </p:txBody>
@@ -5890,7 +5882,7 @@
           <a:lstStyle/>
           <a:p>
             <a:r>
-              <a:t>결과 2</a:t>
+              <a:t>Result 2</a:t>
             </a:r>
           </a:p>
         </p:txBody>
@@ -5911,7 +5903,7 @@
           <a:lstStyle/>
           <a:p>
             <a:r>
-              <a:t>경계부 CD8 점수가 종양 안쪽보다 3.2배 높아요</a:t>
+              <a:t>The CD8 score is 3.2× higher at the border than in the core</a:t>
             </a:r>
           </a:p>
         </p:txBody>
@@ -5967,7 +5959,7 @@
                   <a:srgbClr val="6B7280"/>
                 </a:solidFill>
               </a:rPr>
-              <a:t>표지 유전자 12개 평균. 절편 4개.</a:t>
+              <a:t>Mean of 12 marker genes. 4 sections.</a:t>
             </a:r>
           </a:p>
         </p:txBody>
@@ -6028,7 +6020,7 @@
           <a:lstStyle/>
           <a:p>
             <a:r>
-              <a:t>결과 3</a:t>
+              <a:t>Result 3</a:t>
             </a:r>
           </a:p>
         </p:txBody>
@@ -6049,7 +6041,7 @@
           <a:lstStyle/>
           <a:p>
             <a:r>
-              <a:t>반응군은 경계부 섬유아세포 신호가 절반 이하예요</a:t>
+              <a:t>Responders have less than half the border fibroblast signal</a:t>
             </a:r>
           </a:p>
         </p:txBody>
@@ -6105,7 +6097,7 @@
                   <a:srgbClr val="6B7280"/>
                 </a:solidFill>
               </a:rPr>
-              <a:t>치료 전 생검 절편, 예시 수치.</a:t>
+              <a:t>Pre-treatment biopsy sections, example values.</a:t>
             </a:r>
           </a:p>
         </p:txBody>
@@ -6166,7 +6158,7 @@
           <a:lstStyle/>
           <a:p>
             <a:r>
-              <a:t>결론</a:t>
+              <a:t>Conclusion</a:t>
             </a:r>
           </a:p>
         </p:txBody>
@@ -6187,7 +6179,7 @@
           <a:lstStyle/>
           <a:p>
             <a:r>
-              <a:t>경계부 섬유아세포 장벽이 면역항암 반응을 가를 수 있어요</a:t>
+              <a:t>A border fibroblast barrier may decide immunotherapy response</a:t>
             </a:r>
           </a:p>
         </p:txBody>
@@ -6200,7 +6192,7 @@
         </p:nvSpPr>
         <p:spPr>
           <a:xfrm>
-            <a:off x="468000" y="2138600"/>
+            <a:off x="468000" y="2024872"/>
             <a:ext cx="3608040" cy="1436613"/>
           </a:xfrm>
           <a:prstGeom prst="rect">
@@ -6244,7 +6236,7 @@
         </p:nvSpPr>
         <p:spPr>
           <a:xfrm>
-            <a:off x="608400" y="2325800"/>
+            <a:off x="608400" y="2212072"/>
             <a:ext cx="351000" cy="351000"/>
           </a:xfrm>
           <a:prstGeom prst="ellipse">
@@ -6298,7 +6290,7 @@
         </p:nvSpPr>
         <p:spPr>
           <a:xfrm>
-            <a:off x="608400" y="2793800"/>
+            <a:off x="608400" y="2680072"/>
             <a:ext cx="3327240" cy="594213"/>
           </a:xfrm>
           <a:prstGeom prst="rect">
@@ -6323,7 +6315,7 @@
                   <a:srgbClr val="262B33"/>
                 </a:solidFill>
               </a:rPr>
-              <a:t>경계부에 몰림</a:t>
+              <a:t>Gathered at the border</a:t>
             </a:r>
           </a:p>
           <a:p>
@@ -6338,7 +6330,7 @@
                   <a:srgbClr val="6B7280"/>
                 </a:solidFill>
               </a:rPr>
-              <a:t>CD8 점수 3.2배 (경계부 / 안쪽)</a:t>
+              <a:t>CD8 score 3.2× (border / core)</a:t>
             </a:r>
           </a:p>
         </p:txBody>
@@ -6351,7 +6343,7 @@
         </p:nvSpPr>
         <p:spPr>
           <a:xfrm>
-            <a:off x="4292040" y="2138600"/>
+            <a:off x="4292040" y="2024872"/>
             <a:ext cx="3608040" cy="1436613"/>
           </a:xfrm>
           <a:prstGeom prst="rect">
@@ -6395,7 +6387,7 @@
         </p:nvSpPr>
         <p:spPr>
           <a:xfrm>
-            <a:off x="4432440" y="2325800"/>
+            <a:off x="4432440" y="2212072"/>
             <a:ext cx="351000" cy="351000"/>
           </a:xfrm>
           <a:prstGeom prst="ellipse">
@@ -6449,7 +6441,7 @@
         </p:nvSpPr>
         <p:spPr>
           <a:xfrm>
-            <a:off x="4432440" y="2793800"/>
+            <a:off x="4432440" y="2680072"/>
             <a:ext cx="3327240" cy="594213"/>
           </a:xfrm>
           <a:prstGeom prst="rect">
@@ -6474,7 +6466,7 @@
                   <a:srgbClr val="262B33"/>
                 </a:solidFill>
               </a:rPr>
-              <a:t>섬유아세포 신호</a:t>
+              <a:t>Fibroblast signal</a:t>
             </a:r>
           </a:p>
           <a:p>
@@ -6489,7 +6481,7 @@
                   <a:srgbClr val="6B7280"/>
                 </a:solidFill>
               </a:rPr>
-              <a:t>비반응군에서 2.5배 높음</a:t>
+              <a:t>2.5× higher in non-responders</a:t>
             </a:r>
           </a:p>
         </p:txBody>
@@ -6502,7 +6494,7 @@
         </p:nvSpPr>
         <p:spPr>
           <a:xfrm>
-            <a:off x="8116080" y="2138600"/>
+            <a:off x="8116080" y="2024872"/>
             <a:ext cx="3608040" cy="1436613"/>
           </a:xfrm>
           <a:prstGeom prst="rect">
@@ -6546,7 +6538,7 @@
         </p:nvSpPr>
         <p:spPr>
           <a:xfrm>
-            <a:off x="8256480" y="2325800"/>
+            <a:off x="8256480" y="2212072"/>
             <a:ext cx="351000" cy="351000"/>
           </a:xfrm>
           <a:prstGeom prst="ellipse">
@@ -6600,7 +6592,7 @@
         </p:nvSpPr>
         <p:spPr>
           <a:xfrm>
-            <a:off x="8256480" y="2793800"/>
+            <a:off x="8256480" y="2680072"/>
             <a:ext cx="3327240" cy="594213"/>
           </a:xfrm>
           <a:prstGeom prst="rect">
@@ -6625,7 +6617,7 @@
                   <a:srgbClr val="262B33"/>
                 </a:solidFill>
               </a:rPr>
-              <a:t>반응군은 장벽이 얇음</a:t>
+              <a:t>Thin barrier in responders</a:t>
             </a:r>
           </a:p>
           <a:p>
@@ -6640,7 +6632,7 @@
                   <a:srgbClr val="6B7280"/>
                 </a:solidFill>
               </a:rPr>
-              <a:t>반응군 6명 모두 신호 절반 이하</a:t>
+              <a:t>All 6 responders below half</a:t>
             </a:r>
           </a:p>
         </p:txBody>
@@ -6653,7 +6645,7 @@
         </p:nvCxnSpPr>
         <p:spPr>
           <a:xfrm>
-            <a:off x="2272020" y="3575213"/>
+            <a:off x="2272020" y="3461485"/>
             <a:ext cx="0" cy="327600"/>
           </a:xfrm>
           <a:prstGeom prst="line">
@@ -6688,7 +6680,7 @@
         </p:nvCxnSpPr>
         <p:spPr>
           <a:xfrm>
-            <a:off x="6096060" y="3575213"/>
+            <a:off x="6096060" y="3461485"/>
             <a:ext cx="0" cy="327600"/>
           </a:xfrm>
           <a:prstGeom prst="line">
@@ -6723,7 +6715,7 @@
         </p:nvCxnSpPr>
         <p:spPr>
           <a:xfrm>
-            <a:off x="9920100" y="3575213"/>
+            <a:off x="9920100" y="3461485"/>
             <a:ext cx="0" cy="327600"/>
           </a:xfrm>
           <a:prstGeom prst="line">
@@ -6758,7 +6750,7 @@
         </p:nvCxnSpPr>
         <p:spPr>
           <a:xfrm>
-            <a:off x="2272020" y="3902813"/>
+            <a:off x="2272020" y="3789085"/>
             <a:ext cx="7648080" cy="0"/>
           </a:xfrm>
           <a:prstGeom prst="line">
@@ -6793,7 +6785,7 @@
         </p:nvCxnSpPr>
         <p:spPr>
           <a:xfrm>
-            <a:off x="6096060" y="3902813"/>
+            <a:off x="6096060" y="3789085"/>
             <a:ext cx="0" cy="327600"/>
           </a:xfrm>
           <a:prstGeom prst="line">
@@ -6829,8 +6821,8 @@
         </p:nvSpPr>
         <p:spPr>
           <a:xfrm>
-            <a:off x="2380020" y="4230413"/>
-            <a:ext cx="7432080" cy="762386"/>
+            <a:off x="2380020" y="4116685"/>
+            <a:ext cx="7432080" cy="1103571"/>
           </a:xfrm>
           <a:prstGeom prst="rect">
             <a:avLst/>
@@ -6871,8 +6863,8 @@
         </p:nvSpPr>
         <p:spPr>
           <a:xfrm>
-            <a:off x="2660820" y="4230413"/>
-            <a:ext cx="6870480" cy="762386"/>
+            <a:off x="2660820" y="4116685"/>
+            <a:ext cx="6870480" cy="1103571"/>
           </a:xfrm>
           <a:prstGeom prst="rect">
             <a:avLst/>
@@ -6896,7 +6888,7 @@
                   <a:srgbClr val="FFFFFF"/>
                 </a:solidFill>
               </a:rPr>
-              <a:t>섬유아세포 장벽을 낮추면 면역항암 반응이 늘 수 있다</a:t>
+              <a:t>Lowering the fibroblast barrier may improve immunotherapy response</a:t>
             </a:r>
           </a:p>
         </p:txBody>
@@ -6957,7 +6949,7 @@
           <a:lstStyle/>
           <a:p>
             <a:r>
-              <a:t>감사합니다</a:t>
+              <a:t>Thank you</a:t>
             </a:r>
           </a:p>
         </p:txBody>
@@ -6978,7 +6970,7 @@
           <a:lstStyle/>
           <a:p>
             <a:r>
-              <a:t>대장암 경계부의 면역 틈새가 면역항암 반응을 가른다</a:t>
+              <a:t>A border immune niche decides immunotherapy response in colorectal cancer</a:t>
             </a:r>
           </a:p>
         </p:txBody>
@@ -6999,12 +6991,12 @@
           <a:lstStyle/>
           <a:p>
             <a:r>
-              <a:t>공동저자 · HaLab</a:t>
-            </a:r>
-          </a:p>
-          <a:p>
-            <a:r>
-              <a:t>연구비: 예시 과제 (과제 번호)</a:t>
+              <a:t>Co-authors · HaLab</a:t>
+            </a:r>
+          </a:p>
+          <a:p>
+            <a:r>
+              <a:t>Funding: example grant (grant no.)</a:t>
             </a:r>
           </a:p>
         </p:txBody>
